--- a/images/images.pptx
+++ b/images/images.pptx
@@ -3323,6 +3323,161 @@
           <a:chExt cx="0" cy="0"/>
         </a:xfrm>
       </p:grpSpPr>
+      <p:sp>
+        <p:nvSpPr>
+          <p:cNvPr id="31" name="正方形/長方形 30"/>
+          <p:cNvSpPr/>
+          <p:nvPr/>
+        </p:nvSpPr>
+        <p:spPr>
+          <a:xfrm>
+            <a:off x="155575" y="2358712"/>
+            <a:ext cx="4632449" cy="3230527"/>
+          </a:xfrm>
+          <a:prstGeom prst="rect">
+            <a:avLst/>
+          </a:prstGeom>
+        </p:spPr>
+        <p:style>
+          <a:lnRef idx="1">
+            <a:schemeClr val="accent5"/>
+          </a:lnRef>
+          <a:fillRef idx="2">
+            <a:schemeClr val="accent5"/>
+          </a:fillRef>
+          <a:effectRef idx="1">
+            <a:schemeClr val="accent5"/>
+          </a:effectRef>
+          <a:fontRef idx="minor">
+            <a:schemeClr val="dk1"/>
+          </a:fontRef>
+        </p:style>
+        <p:txBody>
+          <a:bodyPr rtlCol="0" anchor="t" anchorCtr="0"/>
+          <a:lstStyle/>
+          <a:p>
+            <a:r>
+              <a:rPr kumimoji="1" lang="en-US" altLang="ja-JP" dirty="0" smtClean="0"/>
+              <a:t>Node</a:t>
+            </a:r>
+            <a:endParaRPr kumimoji="1" lang="ja-JP" altLang="en-US" dirty="0"/>
+          </a:p>
+        </p:txBody>
+      </p:sp>
+      <p:sp>
+        <p:nvSpPr>
+          <p:cNvPr id="30" name="正方形/長方形 29"/>
+          <p:cNvSpPr/>
+          <p:nvPr/>
+        </p:nvSpPr>
+        <p:spPr>
+          <a:xfrm>
+            <a:off x="460375" y="4581128"/>
+            <a:ext cx="2455441" cy="777876"/>
+          </a:xfrm>
+          <a:prstGeom prst="rect">
+            <a:avLst/>
+          </a:prstGeom>
+        </p:spPr>
+        <p:style>
+          <a:lnRef idx="1">
+            <a:schemeClr val="accent1"/>
+          </a:lnRef>
+          <a:fillRef idx="2">
+            <a:schemeClr val="accent1"/>
+          </a:fillRef>
+          <a:effectRef idx="1">
+            <a:schemeClr val="accent1"/>
+          </a:effectRef>
+          <a:fontRef idx="minor">
+            <a:schemeClr val="dk1"/>
+          </a:fontRef>
+        </p:style>
+        <p:txBody>
+          <a:bodyPr rtlCol="0" anchor="ctr"/>
+          <a:lstStyle/>
+          <a:p>
+            <a:pPr algn="ctr"/>
+            <a:endParaRPr kumimoji="1" lang="ja-JP" altLang="en-US"/>
+          </a:p>
+        </p:txBody>
+      </p:sp>
+      <p:sp>
+        <p:nvSpPr>
+          <p:cNvPr id="29" name="正方形/長方形 28"/>
+          <p:cNvSpPr/>
+          <p:nvPr/>
+        </p:nvSpPr>
+        <p:spPr>
+          <a:xfrm>
+            <a:off x="439083" y="3642454"/>
+            <a:ext cx="2455441" cy="777876"/>
+          </a:xfrm>
+          <a:prstGeom prst="rect">
+            <a:avLst/>
+          </a:prstGeom>
+        </p:spPr>
+        <p:style>
+          <a:lnRef idx="1">
+            <a:schemeClr val="accent1"/>
+          </a:lnRef>
+          <a:fillRef idx="2">
+            <a:schemeClr val="accent1"/>
+          </a:fillRef>
+          <a:effectRef idx="1">
+            <a:schemeClr val="accent1"/>
+          </a:effectRef>
+          <a:fontRef idx="minor">
+            <a:schemeClr val="dk1"/>
+          </a:fontRef>
+        </p:style>
+        <p:txBody>
+          <a:bodyPr rtlCol="0" anchor="ctr"/>
+          <a:lstStyle/>
+          <a:p>
+            <a:pPr algn="ctr"/>
+            <a:endParaRPr kumimoji="1" lang="ja-JP" altLang="en-US"/>
+          </a:p>
+        </p:txBody>
+      </p:sp>
+      <p:sp>
+        <p:nvSpPr>
+          <p:cNvPr id="22" name="正方形/長方形 21"/>
+          <p:cNvSpPr/>
+          <p:nvPr/>
+        </p:nvSpPr>
+        <p:spPr>
+          <a:xfrm>
+            <a:off x="460375" y="2723132"/>
+            <a:ext cx="2455441" cy="777876"/>
+          </a:xfrm>
+          <a:prstGeom prst="rect">
+            <a:avLst/>
+          </a:prstGeom>
+        </p:spPr>
+        <p:style>
+          <a:lnRef idx="1">
+            <a:schemeClr val="accent1"/>
+          </a:lnRef>
+          <a:fillRef idx="2">
+            <a:schemeClr val="accent1"/>
+          </a:fillRef>
+          <a:effectRef idx="1">
+            <a:schemeClr val="accent1"/>
+          </a:effectRef>
+          <a:fontRef idx="minor">
+            <a:schemeClr val="dk1"/>
+          </a:fontRef>
+        </p:style>
+        <p:txBody>
+          <a:bodyPr rtlCol="0" anchor="ctr"/>
+          <a:lstStyle/>
+          <a:p>
+            <a:pPr algn="ctr"/>
+            <a:endParaRPr kumimoji="1" lang="ja-JP" altLang="en-US"/>
+          </a:p>
+        </p:txBody>
+      </p:sp>
       <p:pic>
         <p:nvPicPr>
           <p:cNvPr id="1026" name="Picture 2" descr="logo.png"/>
@@ -3346,8 +3501,8 @@
         </p:blipFill>
         <p:spPr bwMode="auto">
           <a:xfrm>
-            <a:off x="323528" y="2603974"/>
-            <a:ext cx="1584176" cy="695336"/>
+            <a:off x="1885712" y="2878776"/>
+            <a:ext cx="958096" cy="420533"/>
           </a:xfrm>
           <a:prstGeom prst="rect">
             <a:avLst/>
@@ -3387,8 +3542,8 @@
         </p:blipFill>
         <p:spPr bwMode="auto">
           <a:xfrm>
-            <a:off x="323528" y="3563676"/>
-            <a:ext cx="1584176" cy="695336"/>
+            <a:off x="1885712" y="3838478"/>
+            <a:ext cx="958096" cy="420533"/>
           </a:xfrm>
           <a:prstGeom prst="rect">
             <a:avLst/>
@@ -3428,8 +3583,8 @@
         </p:blipFill>
         <p:spPr bwMode="auto">
           <a:xfrm>
-            <a:off x="323528" y="4509120"/>
-            <a:ext cx="1584176" cy="695336"/>
+            <a:off x="1885712" y="4783922"/>
+            <a:ext cx="958096" cy="420533"/>
           </a:xfrm>
           <a:prstGeom prst="rect">
             <a:avLst/>
@@ -3469,8 +3624,394 @@
         </p:blipFill>
         <p:spPr bwMode="auto">
           <a:xfrm>
-            <a:off x="3491880" y="3449381"/>
-            <a:ext cx="1905000" cy="923925"/>
+            <a:off x="3468648" y="3769353"/>
+            <a:ext cx="1152128" cy="558782"/>
+          </a:xfrm>
+          <a:prstGeom prst="rect">
+            <a:avLst/>
+          </a:prstGeom>
+          <a:noFill/>
+          <a:extLst>
+            <a:ext uri="{909E8E84-426E-40DD-AFC4-6F175D3DCCD1}">
+              <a14:hiddenFill xmlns:a14="http://schemas.microsoft.com/office/drawing/2010/main">
+                <a:solidFill>
+                  <a:srgbClr val="FFFFFF"/>
+                </a:solidFill>
+              </a14:hiddenFill>
+            </a:ext>
+          </a:extLst>
+        </p:spPr>
+      </p:pic>
+      <p:pic>
+        <p:nvPicPr>
+          <p:cNvPr id="3" name="Picture 2" descr="G:\マイドライブ\kubernetes\documents\ky0000.github.io\container-monitoring\images\zabbix-logo.png"/>
+          <p:cNvPicPr>
+            <a:picLocks noChangeAspect="1" noChangeArrowheads="1"/>
+          </p:cNvPicPr>
+          <p:nvPr/>
+        </p:nvPicPr>
+        <p:blipFill>
+          <a:blip r:embed="rId4">
+            <a:extLst>
+              <a:ext uri="{28A0092B-C50C-407E-A947-70E740481C1C}">
+                <a14:useLocalDpi xmlns:a14="http://schemas.microsoft.com/office/drawing/2010/main" val="0"/>
+              </a:ext>
+            </a:extLst>
+          </a:blip>
+          <a:srcRect/>
+          <a:stretch>
+            <a:fillRect/>
+          </a:stretch>
+        </p:blipFill>
+        <p:spPr bwMode="auto">
+          <a:xfrm>
+            <a:off x="5436096" y="3898968"/>
+            <a:ext cx="1152128" cy="299553"/>
+          </a:xfrm>
+          <a:prstGeom prst="rect">
+            <a:avLst/>
+          </a:prstGeom>
+          <a:noFill/>
+          <a:extLst>
+            <a:ext uri="{909E8E84-426E-40DD-AFC4-6F175D3DCCD1}">
+              <a14:hiddenFill xmlns:a14="http://schemas.microsoft.com/office/drawing/2010/main">
+                <a:solidFill>
+                  <a:srgbClr val="FFFFFF"/>
+                </a:solidFill>
+              </a14:hiddenFill>
+            </a:ext>
+          </a:extLst>
+        </p:spPr>
+      </p:pic>
+      <p:cxnSp>
+        <p:nvCxnSpPr>
+          <p:cNvPr id="7" name="直線矢印コネクタ 6"/>
+          <p:cNvCxnSpPr>
+            <a:stCxn id="1026" idx="3"/>
+            <a:endCxn id="1028" idx="1"/>
+          </p:cNvCxnSpPr>
+          <p:nvPr/>
+        </p:nvCxnSpPr>
+        <p:spPr>
+          <a:xfrm>
+            <a:off x="2843808" y="3089043"/>
+            <a:ext cx="624840" cy="959701"/>
+          </a:xfrm>
+          <a:prstGeom prst="straightConnector1">
+            <a:avLst/>
+          </a:prstGeom>
+          <a:ln>
+            <a:tailEnd type="arrow"/>
+          </a:ln>
+        </p:spPr>
+        <p:style>
+          <a:lnRef idx="3">
+            <a:schemeClr val="accent3"/>
+          </a:lnRef>
+          <a:fillRef idx="0">
+            <a:schemeClr val="accent3"/>
+          </a:fillRef>
+          <a:effectRef idx="2">
+            <a:schemeClr val="accent3"/>
+          </a:effectRef>
+          <a:fontRef idx="minor">
+            <a:schemeClr val="tx1"/>
+          </a:fontRef>
+        </p:style>
+      </p:cxnSp>
+      <p:cxnSp>
+        <p:nvCxnSpPr>
+          <p:cNvPr id="10" name="直線矢印コネクタ 9"/>
+          <p:cNvCxnSpPr>
+            <a:stCxn id="5" idx="3"/>
+            <a:endCxn id="1028" idx="1"/>
+          </p:cNvCxnSpPr>
+          <p:nvPr/>
+        </p:nvCxnSpPr>
+        <p:spPr>
+          <a:xfrm flipV="1">
+            <a:off x="2843808" y="4048744"/>
+            <a:ext cx="624840" cy="1"/>
+          </a:xfrm>
+          <a:prstGeom prst="straightConnector1">
+            <a:avLst/>
+          </a:prstGeom>
+          <a:ln>
+            <a:tailEnd type="arrow"/>
+          </a:ln>
+        </p:spPr>
+        <p:style>
+          <a:lnRef idx="3">
+            <a:schemeClr val="accent3"/>
+          </a:lnRef>
+          <a:fillRef idx="0">
+            <a:schemeClr val="accent3"/>
+          </a:fillRef>
+          <a:effectRef idx="2">
+            <a:schemeClr val="accent3"/>
+          </a:effectRef>
+          <a:fontRef idx="minor">
+            <a:schemeClr val="tx1"/>
+          </a:fontRef>
+        </p:style>
+      </p:cxnSp>
+      <p:cxnSp>
+        <p:nvCxnSpPr>
+          <p:cNvPr id="11" name="直線矢印コネクタ 10"/>
+          <p:cNvCxnSpPr>
+            <a:stCxn id="6" idx="3"/>
+            <a:endCxn id="1028" idx="1"/>
+          </p:cNvCxnSpPr>
+          <p:nvPr/>
+        </p:nvCxnSpPr>
+        <p:spPr>
+          <a:xfrm flipV="1">
+            <a:off x="2843808" y="4048744"/>
+            <a:ext cx="624840" cy="945445"/>
+          </a:xfrm>
+          <a:prstGeom prst="straightConnector1">
+            <a:avLst/>
+          </a:prstGeom>
+          <a:ln>
+            <a:tailEnd type="arrow"/>
+          </a:ln>
+        </p:spPr>
+        <p:style>
+          <a:lnRef idx="3">
+            <a:schemeClr val="accent3"/>
+          </a:lnRef>
+          <a:fillRef idx="0">
+            <a:schemeClr val="accent3"/>
+          </a:fillRef>
+          <a:effectRef idx="2">
+            <a:schemeClr val="accent3"/>
+          </a:effectRef>
+          <a:fontRef idx="minor">
+            <a:schemeClr val="tx1"/>
+          </a:fontRef>
+        </p:style>
+      </p:cxnSp>
+      <p:cxnSp>
+        <p:nvCxnSpPr>
+          <p:cNvPr id="19" name="直線矢印コネクタ 18"/>
+          <p:cNvCxnSpPr>
+            <a:stCxn id="1028" idx="3"/>
+            <a:endCxn id="3" idx="1"/>
+          </p:cNvCxnSpPr>
+          <p:nvPr/>
+        </p:nvCxnSpPr>
+        <p:spPr>
+          <a:xfrm>
+            <a:off x="4620776" y="4048744"/>
+            <a:ext cx="815320" cy="1"/>
+          </a:xfrm>
+          <a:prstGeom prst="straightConnector1">
+            <a:avLst/>
+          </a:prstGeom>
+          <a:ln>
+            <a:tailEnd type="arrow"/>
+          </a:ln>
+        </p:spPr>
+        <p:style>
+          <a:lnRef idx="3">
+            <a:schemeClr val="accent3"/>
+          </a:lnRef>
+          <a:fillRef idx="0">
+            <a:schemeClr val="accent3"/>
+          </a:fillRef>
+          <a:effectRef idx="2">
+            <a:schemeClr val="accent3"/>
+          </a:effectRef>
+          <a:fontRef idx="minor">
+            <a:schemeClr val="tx1"/>
+          </a:fontRef>
+        </p:style>
+      </p:cxnSp>
+      <p:sp>
+        <p:nvSpPr>
+          <p:cNvPr id="20" name="AutoShape 4" descr="「Docker logo」の画像検索結果"/>
+          <p:cNvSpPr>
+            <a:spLocks noChangeAspect="1" noChangeArrowheads="1"/>
+          </p:cNvSpPr>
+          <p:nvPr/>
+        </p:nvSpPr>
+        <p:spPr bwMode="auto">
+          <a:xfrm>
+            <a:off x="155575" y="-144463"/>
+            <a:ext cx="304800" cy="304801"/>
+          </a:xfrm>
+          <a:prstGeom prst="rect">
+            <a:avLst/>
+          </a:prstGeom>
+          <a:noFill/>
+          <a:extLst>
+            <a:ext uri="{909E8E84-426E-40DD-AFC4-6F175D3DCCD1}">
+              <a14:hiddenFill xmlns:a14="http://schemas.microsoft.com/office/drawing/2010/main">
+                <a:solidFill>
+                  <a:srgbClr val="FFFFFF"/>
+                </a:solidFill>
+              </a14:hiddenFill>
+            </a:ext>
+          </a:extLst>
+        </p:spPr>
+        <p:txBody>
+          <a:bodyPr vert="horz" wrap="square" lIns="91440" tIns="45720" rIns="91440" bIns="45720" numCol="1" anchor="t" anchorCtr="0" compatLnSpc="1">
+            <a:prstTxWarp prst="textNoShape">
+              <a:avLst/>
+            </a:prstTxWarp>
+          </a:bodyPr>
+          <a:lstStyle/>
+          <a:p>
+            <a:endParaRPr lang="ja-JP" altLang="en-US"/>
+          </a:p>
+        </p:txBody>
+      </p:sp>
+      <p:sp>
+        <p:nvSpPr>
+          <p:cNvPr id="21" name="AutoShape 6" descr="「Docker logo」の画像検索結果"/>
+          <p:cNvSpPr>
+            <a:spLocks noChangeAspect="1" noChangeArrowheads="1"/>
+          </p:cNvSpPr>
+          <p:nvPr/>
+        </p:nvSpPr>
+        <p:spPr bwMode="auto">
+          <a:xfrm>
+            <a:off x="307975" y="7937"/>
+            <a:ext cx="304800" cy="304801"/>
+          </a:xfrm>
+          <a:prstGeom prst="rect">
+            <a:avLst/>
+          </a:prstGeom>
+          <a:noFill/>
+          <a:extLst>
+            <a:ext uri="{909E8E84-426E-40DD-AFC4-6F175D3DCCD1}">
+              <a14:hiddenFill xmlns:a14="http://schemas.microsoft.com/office/drawing/2010/main">
+                <a:solidFill>
+                  <a:srgbClr val="FFFFFF"/>
+                </a:solidFill>
+              </a14:hiddenFill>
+            </a:ext>
+          </a:extLst>
+        </p:spPr>
+        <p:txBody>
+          <a:bodyPr vert="horz" wrap="square" lIns="91440" tIns="45720" rIns="91440" bIns="45720" numCol="1" anchor="t" anchorCtr="0" compatLnSpc="1">
+            <a:prstTxWarp prst="textNoShape">
+              <a:avLst/>
+            </a:prstTxWarp>
+          </a:bodyPr>
+          <a:lstStyle/>
+          <a:p>
+            <a:endParaRPr lang="ja-JP" altLang="en-US"/>
+          </a:p>
+        </p:txBody>
+      </p:sp>
+      <p:pic>
+        <p:nvPicPr>
+          <p:cNvPr id="1032" name="Picture 8" descr="G:\マイドライブ\kubernetes\documents\ky0000.github.io\container-monitoring\images\docker-logo.png"/>
+          <p:cNvPicPr>
+            <a:picLocks noChangeAspect="1" noChangeArrowheads="1"/>
+          </p:cNvPicPr>
+          <p:nvPr/>
+        </p:nvPicPr>
+        <p:blipFill>
+          <a:blip r:embed="rId5" cstate="print">
+            <a:extLst>
+              <a:ext uri="{28A0092B-C50C-407E-A947-70E740481C1C}">
+                <a14:useLocalDpi xmlns:a14="http://schemas.microsoft.com/office/drawing/2010/main" val="0"/>
+              </a:ext>
+            </a:extLst>
+          </a:blip>
+          <a:srcRect/>
+          <a:stretch>
+            <a:fillRect/>
+          </a:stretch>
+        </p:blipFill>
+        <p:spPr bwMode="auto">
+          <a:xfrm>
+            <a:off x="460375" y="2723132"/>
+            <a:ext cx="1444934" cy="722467"/>
+          </a:xfrm>
+          <a:prstGeom prst="rect">
+            <a:avLst/>
+          </a:prstGeom>
+          <a:noFill/>
+          <a:extLst>
+            <a:ext uri="{909E8E84-426E-40DD-AFC4-6F175D3DCCD1}">
+              <a14:hiddenFill xmlns:a14="http://schemas.microsoft.com/office/drawing/2010/main">
+                <a:solidFill>
+                  <a:srgbClr val="FFFFFF"/>
+                </a:solidFill>
+              </a14:hiddenFill>
+            </a:ext>
+          </a:extLst>
+        </p:spPr>
+      </p:pic>
+      <p:pic>
+        <p:nvPicPr>
+          <p:cNvPr id="26" name="Picture 8" descr="G:\マイドライブ\kubernetes\documents\ky0000.github.io\container-monitoring\images\docker-logo.png"/>
+          <p:cNvPicPr>
+            <a:picLocks noChangeAspect="1" noChangeArrowheads="1"/>
+          </p:cNvPicPr>
+          <p:nvPr/>
+        </p:nvPicPr>
+        <p:blipFill>
+          <a:blip r:embed="rId5" cstate="print">
+            <a:extLst>
+              <a:ext uri="{28A0092B-C50C-407E-A947-70E740481C1C}">
+                <a14:useLocalDpi xmlns:a14="http://schemas.microsoft.com/office/drawing/2010/main" val="0"/>
+              </a:ext>
+            </a:extLst>
+          </a:blip>
+          <a:srcRect/>
+          <a:stretch>
+            <a:fillRect/>
+          </a:stretch>
+        </p:blipFill>
+        <p:spPr bwMode="auto">
+          <a:xfrm>
+            <a:off x="460375" y="3687510"/>
+            <a:ext cx="1444934" cy="722467"/>
+          </a:xfrm>
+          <a:prstGeom prst="rect">
+            <a:avLst/>
+          </a:prstGeom>
+          <a:noFill/>
+          <a:extLst>
+            <a:ext uri="{909E8E84-426E-40DD-AFC4-6F175D3DCCD1}">
+              <a14:hiddenFill xmlns:a14="http://schemas.microsoft.com/office/drawing/2010/main">
+                <a:solidFill>
+                  <a:srgbClr val="FFFFFF"/>
+                </a:solidFill>
+              </a14:hiddenFill>
+            </a:ext>
+          </a:extLst>
+        </p:spPr>
+      </p:pic>
+      <p:pic>
+        <p:nvPicPr>
+          <p:cNvPr id="27" name="Picture 8" descr="G:\マイドライブ\kubernetes\documents\ky0000.github.io\container-monitoring\images\docker-logo.png"/>
+          <p:cNvPicPr>
+            <a:picLocks noChangeAspect="1" noChangeArrowheads="1"/>
+          </p:cNvPicPr>
+          <p:nvPr/>
+        </p:nvPicPr>
+        <p:blipFill>
+          <a:blip r:embed="rId5" cstate="print">
+            <a:extLst>
+              <a:ext uri="{28A0092B-C50C-407E-A947-70E740481C1C}">
+                <a14:useLocalDpi xmlns:a14="http://schemas.microsoft.com/office/drawing/2010/main" val="0"/>
+              </a:ext>
+            </a:extLst>
+          </a:blip>
+          <a:srcRect/>
+          <a:stretch>
+            <a:fillRect/>
+          </a:stretch>
+        </p:blipFill>
+        <p:spPr bwMode="auto">
+          <a:xfrm>
+            <a:off x="460375" y="4632954"/>
+            <a:ext cx="1444934" cy="722467"/>
           </a:xfrm>
           <a:prstGeom prst="rect">
             <a:avLst/>
